--- a/public/materialy/1L/10/Prezentace k hodinám/4. Delegation a Description.pptx
+++ b/public/materialy/1L/10/Prezentace k hodinám/4. Delegation a Description.pptx
@@ -548,7 +548,7 @@
           </a:p>
           <a:p xmlns:a="http://schemas.openxmlformats.org/drawingml/2006/main">
             <a:r>
-              <a:t>Podklady: 04_delegacni_situace.csv, 04_promptova_dilna.txt</a:t>
+              <a:t>Podklady: 4. Delegační situace.csv, 4. Promptová dílna.txt</a:t>
             </a:r>
           </a:p>
           <a:p xmlns:a="http://schemas.openxmlformats.org/drawingml/2006/main">
@@ -574,7 +574,7 @@
           </a:p>
           <a:p xmlns:a="http://schemas.openxmlformats.org/drawingml/2006/main">
             <a:r>
-              <a:t>AI_Fluency__Key_Terminology_Cheat_Sheet.pdf</a:t>
+              <a:t>AI_Fluency_Key_Terminology_Cheat_Sheet.pdf</a:t>
             </a:r>
           </a:p>
           <a:p xmlns:a="http://schemas.openxmlformats.org/drawingml/2006/main">
@@ -709,7 +709,7 @@
           </a:p>
           <a:p xmlns:a="http://schemas.openxmlformats.org/drawingml/2006/main">
             <a:r>
-              <a:t>AI_Fluency__Key_Terminology_Cheat_Sheet.pdf</a:t>
+              <a:t>AI_Fluency_Key_Terminology_Cheat_Sheet.pdf</a:t>
             </a:r>
           </a:p>
           <a:p xmlns:a="http://schemas.openxmlformats.org/drawingml/2006/main">
@@ -839,7 +839,7 @@
           </a:p>
           <a:p xmlns:a="http://schemas.openxmlformats.org/drawingml/2006/main">
             <a:r>
-              <a:t>AI_Fluency__Key_Terminology_Cheat_Sheet.pdf</a:t>
+              <a:t>AI_Fluency_Key_Terminology_Cheat_Sheet.pdf</a:t>
             </a:r>
           </a:p>
           <a:p xmlns:a="http://schemas.openxmlformats.org/drawingml/2006/main">
@@ -934,17 +934,17 @@
           <a:lstStyle xmlns:a="http://schemas.openxmlformats.org/drawingml/2006/main"/>
           <a:p xmlns:a="http://schemas.openxmlformats.org/drawingml/2006/main">
             <a:r>
-              <a:t>Podklady: 04_delegacni_situace.csv, 04_promptova_dilna.txt</a:t>
-            </a:r>
-          </a:p>
-          <a:p xmlns:a="http://schemas.openxmlformats.org/drawingml/2006/main">
-            <a:r>
-              <a:t>1. V souboru 04_delegacni_situace.csv vyber jednu nízkorizikovou úlohu a rozděl role člověka a AI.</a:t>
-            </a:r>
-          </a:p>
-          <a:p xmlns:a="http://schemas.openxmlformats.org/drawingml/2006/main">
-            <a:r>
-              <a:t>2. Otevři školní Copilot a spusť výchozí prompt ze souboru 04_promptova_dilna.txt.</a:t>
+              <a:t>Podklady: 4. Delegační situace.csv, 4. Promptová dílna.txt</a:t>
+            </a:r>
+          </a:p>
+          <a:p xmlns:a="http://schemas.openxmlformats.org/drawingml/2006/main">
+            <a:r>
+              <a:t>1. V souboru 4. Delegační situace.csv vyber jednu nízkorizikovou úlohu a rozděl role člověka a AI.</a:t>
+            </a:r>
+          </a:p>
+          <a:p xmlns:a="http://schemas.openxmlformats.org/drawingml/2006/main">
+            <a:r>
+              <a:t>2. Otevři školní Copilot a spusť výchozí prompt ze souboru 4. Promptová dílna.txt.</a:t>
             </a:r>
           </a:p>
           <a:p xmlns:a="http://schemas.openxmlformats.org/drawingml/2006/main">
@@ -984,7 +984,7 @@
           </a:p>
           <a:p xmlns:a="http://schemas.openxmlformats.org/drawingml/2006/main">
             <a:r>
-              <a:t>AI_Fluency__Key_Terminology_Cheat_Sheet.pdf</a:t>
+              <a:t>AI_Fluency_Key_Terminology_Cheat_Sheet.pdf</a:t>
             </a:r>
           </a:p>
           <a:p xmlns:a="http://schemas.openxmlformats.org/drawingml/2006/main">
@@ -1119,7 +1119,7 @@
           </a:p>
           <a:p xmlns:a="http://schemas.openxmlformats.org/drawingml/2006/main">
             <a:r>
-              <a:t>AI_Fluency__Key_Terminology_Cheat_Sheet.pdf</a:t>
+              <a:t>AI_Fluency_Key_Terminology_Cheat_Sheet.pdf</a:t>
             </a:r>
           </a:p>
           <a:p xmlns:a="http://schemas.openxmlformats.org/drawingml/2006/main">
@@ -1244,7 +1244,7 @@
           </a:p>
           <a:p xmlns:a="http://schemas.openxmlformats.org/drawingml/2006/main">
             <a:r>
-              <a:t>AI_Fluency__Key_Terminology_Cheat_Sheet.pdf</a:t>
+              <a:t>AI_Fluency_Key_Terminology_Cheat_Sheet.pdf</a:t>
             </a:r>
           </a:p>
           <a:p xmlns:a="http://schemas.openxmlformats.org/drawingml/2006/main">
@@ -1369,7 +1369,7 @@
           </a:p>
           <a:p xmlns:a="http://schemas.openxmlformats.org/drawingml/2006/main">
             <a:r>
-              <a:t>AI_Fluency__Key_Terminology_Cheat_Sheet.pdf</a:t>
+              <a:t>AI_Fluency_Key_Terminology_Cheat_Sheet.pdf</a:t>
             </a:r>
           </a:p>
           <a:p xmlns:a="http://schemas.openxmlformats.org/drawingml/2006/main">
@@ -4164,7 +4164,7 @@
               </a:defRPr>
             </a:pPr>
             <a:r>
-              <a:t>04_delegacni_situace.csv · 04_promptova_dilna.txt</a:t>
+              <a:t>4. Delegační situace.csv · 4. Promptová dílna.txt</a:t>
             </a:r>
           </a:p>
         </p:txBody>
@@ -4287,7 +4287,7 @@
               </a:defRPr>
             </a:pPr>
             <a:r>
-              <a:t>V souboru 04_delegacni_situace.csv vyber jednu nízkorizikovou úlohu a rozděl role člověka a AI.</a:t>
+              <a:t>V souboru 4. Delegační situace.csv vyber jednu nízkorizikovou úlohu a rozděl role člověka a AI.</a:t>
             </a:r>
           </a:p>
         </p:txBody>
@@ -4410,7 +4410,7 @@
               </a:defRPr>
             </a:pPr>
             <a:r>
-              <a:t>Otevři školní Copilot a spusť výchozí prompt ze souboru 04_promptova_dilna.txt.</a:t>
+              <a:t>Otevři školní Copilot a spusť výchozí prompt ze souboru 4. Promptová dílna.txt.</a:t>
             </a:r>
           </a:p>
         </p:txBody>

--- a/public/materialy/1L/10/Prezentace k hodinám/4. Delegation a Description.pptx
+++ b/public/materialy/1L/10/Prezentace k hodinám/4. Delegation a Description.pptx
@@ -558,7 +558,7 @@
           </a:p>
           <a:p xmlns:a="http://schemas.openxmlformats.org/drawingml/2006/main">
             <a:r>
-              <a:t>Před začátkem ověřte, že studenti mají otevřený digitální pracovní sešit a potřebné soubory.</a:t>
+              <a:t>Před začátkem ověř, že studenti mají otevřený digitální pracovní sešit a potřebné soubory.</a:t>
             </a:r>
           </a:p>
           <a:p xmlns:a="http://schemas.openxmlformats.org/drawingml/2006/main"/>
@@ -604,7 +604,7 @@
           </a:p>
           <a:p xmlns:a="http://schemas.openxmlformats.org/drawingml/2006/main">
             <a:r>
-              <a:t>Řekněte nahlas (cca 20 s): Učíme se postup, ne jedno tlačítko. Copilot je ukázka, protože ho škola poskytuje; stejný postup funguje i v jiném AI asistentovi. Podrobnosti pro učitele: příloha Přenesení hodin 4–6 na jiný AI nástroj.</a:t>
+              <a:t>Řekni nahlas (cca 20 s): Učíme se postup, ne jedno tlačítko. Copilot je ukázka, protože ho škola poskytuje; stejný postup funguje i v jiném AI asistentovi. Podrobnosti pro učitele: příloha Přenesení hodin 4–6 na jiný AI nástroj.</a:t>
             </a:r>
           </a:p>
         </p:txBody>
@@ -689,7 +689,7 @@
           </a:p>
           <a:p xmlns:a="http://schemas.openxmlformats.org/drawingml/2006/main">
             <a:r>
-              <a:t>Neprozrazujte odpověď. Cílem je zachytit počáteční model studenta, ke kterému se vrátí při reflexi.</a:t>
+              <a:t>Neprozrazuj odpověď. Cílem je zachytit počáteční model studenta, ke kterému se vrátí při reflexi.</a:t>
             </a:r>
           </a:p>
           <a:p xmlns:a="http://schemas.openxmlformats.org/drawingml/2006/main">
@@ -809,7 +809,7 @@
           </a:p>
           <a:p xmlns:a="http://schemas.openxmlformats.org/drawingml/2006/main">
             <a:r>
-              <a:t>Postup: Propojte rozdělení rolí s rámcem goal, context, source, expectations.</a:t>
+              <a:t>Postup: Propoj rozdělení rolí s rámcem goal, context, source, expectations.</a:t>
             </a:r>
           </a:p>
           <a:p xmlns:a="http://schemas.openxmlformats.org/drawingml/2006/main">
@@ -819,7 +819,7 @@
           </a:p>
           <a:p xmlns:a="http://schemas.openxmlformats.org/drawingml/2006/main">
             <a:r>
-              <a:t>Po každém pojmu vyžádejte jeden příklad a jeden protipříklad. Vysvětlení má používat způsob fungování, ne značku nástroje.</a:t>
+              <a:t>Po každém pojmu vyžádej jeden příklad a jeden protipříklad. Vysvětlení má používat způsob fungování, ne značku nástroje.</a:t>
             </a:r>
           </a:p>
           <a:p xmlns:a="http://schemas.openxmlformats.org/drawingml/2006/main">
@@ -964,7 +964,7 @@
           </a:p>
           <a:p xmlns:a="http://schemas.openxmlformats.org/drawingml/2006/main">
             <a:r>
-              <a:t>Během práce pomáhejte otázkami, nepřebírejte myš ani tvorbu promptu. Vyžadujte průběžné ukládání výstupů a lidských rozhodnutí.</a:t>
+              <a:t>Během práce pomáhej otázkami, nepřebírej myš ani tvorbu promptu. Vyžaduj průběžné ukládání výstupů a lidských rozhodnutí.</a:t>
             </a:r>
           </a:p>
           <a:p xmlns:a="http://schemas.openxmlformats.org/drawingml/2006/main">
@@ -1089,7 +1089,7 @@
           </a:p>
           <a:p xmlns:a="http://schemas.openxmlformats.org/drawingml/2006/main">
             <a:r>
-              <a:t>Podpora: Použijte rozhodovací kartu cíl – riziko – data – ověření a doplňovací šablonu promptu.</a:t>
+              <a:t>Podpora: Použij rozhodovací kartu cíl – riziko – data – ověření a doplňovací šablonu promptu.</a:t>
             </a:r>
           </a:p>
           <a:p xmlns:a="http://schemas.openxmlformats.org/drawingml/2006/main">
@@ -1099,7 +1099,7 @@
           </a:p>
           <a:p xmlns:a="http://schemas.openxmlformats.org/drawingml/2006/main">
             <a:r>
-              <a:t>Proveďte rychlou párovou kontrolu: jeden dobře doložený bod a jedna konkrétní otázka k dopracování.</a:t>
+              <a:t>Proveď rychlou párovou kontrolu: jeden dobře doložený bod a jedna konkrétní otázka k dopracování.</a:t>
             </a:r>
           </a:p>
           <a:p xmlns:a="http://schemas.openxmlformats.org/drawingml/2006/main">
@@ -1219,12 +1219,12 @@
           </a:p>
           <a:p xmlns:a="http://schemas.openxmlformats.org/drawingml/2006/main">
             <a:r>
-              <a:t>Časté omyly: „Nejrychlejší postup je vždy nejlepší.“ → Vraťte volbu k cíli učení, ceně chyby a lidské odpovědnosti. | „Delší prompt je automaticky lepší.“ → Hodnoťte relevanci a jednoznačnost každé informace.</a:t>
-            </a:r>
-          </a:p>
-          <a:p xmlns:a="http://schemas.openxmlformats.org/drawingml/2006/main">
-            <a:r>
-              <a:t>Nečtěte řešení slovo od slova. Porovnejte dva studentské postupy a nechte třídu určit, který má lepší důkazy nebo jasnější lidské rozhodnutí.</a:t>
+              <a:t>Časté omyly: „Nejrychlejší postup je vždy nejlepší.“ → Vrať volbu k cíli učení, ceně chyby a lidské odpovědnosti. | „Delší prompt je automaticky lepší.“ → Hodnoť relevanci a jednoznačnost každé informace.</a:t>
+            </a:r>
+          </a:p>
+          <a:p xmlns:a="http://schemas.openxmlformats.org/drawingml/2006/main">
+            <a:r>
+              <a:t>Nečti řešení slovo od slova. Porovnej dva studentské postupy a nech třídu určit, který má lepší důkazy nebo jasnější lidské rozhodnutí.</a:t>
             </a:r>
           </a:p>
           <a:p xmlns:a="http://schemas.openxmlformats.org/drawingml/2006/main">
@@ -1344,12 +1344,12 @@
           </a:p>
           <a:p xmlns:a="http://schemas.openxmlformats.org/drawingml/2006/main">
             <a:r>
-              <a:t>Když technika selže: Použijte připravené modelové výstupy v pracovním sešitu a formulujte prompty bez živého Copilotu.</a:t>
-            </a:r>
-          </a:p>
-          <a:p xmlns:a="http://schemas.openxmlformats.org/drawingml/2006/main">
-            <a:r>
-              <a:t>Odpovědi použijte jako diagnostiku pro začátek další hodiny. U hodiny 3 navazuje diagnostická brána; u hodiny 6 jde o součást závěrečné reflexe.</a:t>
+              <a:t>Když technika selže: Použij připravené modelové výstupy v pracovním sešitu a formuluj prompty bez živého Copilotu.</a:t>
+            </a:r>
+          </a:p>
+          <a:p xmlns:a="http://schemas.openxmlformats.org/drawingml/2006/main">
+            <a:r>
+              <a:t>Odpovědi použij jako diagnostiku pro začátek další hodiny. U hodiny 3 navazuje diagnostická brána; u hodiny 6 jde o součást závěrečné reflexe.</a:t>
             </a:r>
           </a:p>
           <a:p xmlns:a="http://schemas.openxmlformats.org/drawingml/2006/main">
